--- a/dist/gstack-tutorial-4_ZH.pptx
+++ b/dist/gstack-tutorial-4_ZH.pptx
@@ -25,6 +25,10 @@
     <p:sldId id="273" r:id="rId24"/>
     <p:sldId id="274" r:id="rId25"/>
     <p:sldId id="275" r:id="rId26"/>
+    <p:sldId id="276" r:id="rId27"/>
+    <p:sldId id="277" r:id="rId28"/>
+    <p:sldId id="278" r:id="rId29"/>
+    <p:sldId id="279" r:id="rId30"/>
   </p:sldIdLst>
   <p:sldSz cx="12191695" cy="6858000" type="screen4x3"/>
   <p:notesSz cx="6858000" cy="9144000"/>
@@ -12596,6 +12600,2794 @@
                 <a:cs typeface="Microsoft YaHei"/>
               </a:rPr>
               <a:t>19</a:t>
+            </a:r>
+          </a:p>
+        </p:txBody>
+      </p:sp>
+    </p:spTree>
+  </p:cSld>
+  <p:clrMapOvr>
+    <a:masterClrMapping/>
+  </p:clrMapOvr>
+</p:sld>
+</file>
+
+<file path=ppt/slides/slide21.xml><?xml version="1.0" encoding="utf-8"?>
+<p:sld xmlns:a="http://schemas.openxmlformats.org/drawingml/2006/main" xmlns:p="http://schemas.openxmlformats.org/presentationml/2006/main" xmlns:r="http://schemas.openxmlformats.org/officeDocument/2006/relationships">
+  <p:cSld>
+    <p:spTree>
+      <p:nvGrpSpPr>
+        <p:cNvPr id="1" name=""/>
+        <p:cNvGrpSpPr/>
+        <p:nvPr/>
+      </p:nvGrpSpPr>
+      <p:grpSpPr/>
+      <p:sp>
+        <p:nvSpPr>
+          <p:cNvPr id="2" name="TextBox 1"/>
+          <p:cNvSpPr txBox="1"/>
+          <p:nvPr/>
+        </p:nvSpPr>
+        <p:spPr>
+          <a:xfrm>
+            <a:off x="685800" y="457200"/>
+            <a:ext cx="10820095" cy="274320"/>
+          </a:xfrm>
+          <a:prstGeom prst="rect">
+            <a:avLst/>
+          </a:prstGeom>
+          <a:noFill/>
+        </p:spPr>
+        <p:txBody>
+          <a:bodyPr wrap="square" anchor="t" lIns="0" rIns="0" tIns="0" bIns="0">
+            <a:noAutofit/>
+          </a:bodyPr>
+          <a:lstStyle/>
+          <a:p>
+            <a:pPr algn="l"/>
+            <a:r>
+              <a:rPr sz="1600" b="1" i="0">
+                <a:solidFill>
+                  <a:srgbClr val="1F4E78"/>
+                </a:solidFill>
+                <a:latin typeface="Calibri"/>
+                <a:ea typeface="Microsoft YaHei"/>
+                <a:cs typeface="Microsoft YaHei"/>
+              </a:rPr>
+              <a:t>教程 4.1 —— 产品设计复核</a:t>
+            </a:r>
+          </a:p>
+        </p:txBody>
+      </p:sp>
+      <p:sp>
+        <p:nvSpPr>
+          <p:cNvPr id="3" name="TextBox 2"/>
+          <p:cNvSpPr txBox="1"/>
+          <p:nvPr/>
+        </p:nvSpPr>
+        <p:spPr>
+          <a:xfrm>
+            <a:off x="685800" y="786384"/>
+            <a:ext cx="10820095" cy="541528"/>
+          </a:xfrm>
+          <a:prstGeom prst="rect">
+            <a:avLst/>
+          </a:prstGeom>
+          <a:noFill/>
+        </p:spPr>
+        <p:txBody>
+          <a:bodyPr wrap="square" anchor="t" lIns="0" rIns="0" tIns="0" bIns="0">
+            <a:noAutofit/>
+          </a:bodyPr>
+          <a:lstStyle/>
+          <a:p>
+            <a:pPr algn="l">
+              <a:lnSpc>
+                <a:spcPct val="108000"/>
+              </a:lnSpc>
+            </a:pPr>
+            <a:r>
+              <a:rPr sz="3200" b="1" i="0">
+                <a:solidFill>
+                  <a:srgbClr val="1F4E78"/>
+                </a:solidFill>
+                <a:latin typeface="Calibri"/>
+                <a:ea typeface="Microsoft YaHei"/>
+                <a:cs typeface="Microsoft YaHei"/>
+              </a:rPr>
+              <a:t>一个能用、却依然读起来像工程原型的产品</a:t>
+            </a:r>
+          </a:p>
+        </p:txBody>
+      </p:sp>
+      <p:sp>
+        <p:nvSpPr>
+          <p:cNvPr id="4" name="Rectangle 3"/>
+          <p:cNvSpPr/>
+          <p:nvPr/>
+        </p:nvSpPr>
+        <p:spPr>
+          <a:xfrm>
+            <a:off x="685800" y="1437640"/>
+            <a:ext cx="10820095" cy="9525"/>
+          </a:xfrm>
+          <a:prstGeom prst="rect">
+            <a:avLst/>
+          </a:prstGeom>
+          <a:solidFill>
+            <a:srgbClr val="1F4E78"/>
+          </a:solidFill>
+          <a:ln>
+            <a:noFill/>
+          </a:ln>
+          <a:effectLst/>
+        </p:spPr>
+        <p:style>
+          <a:lnRef idx="1">
+            <a:schemeClr val="accent1"/>
+          </a:lnRef>
+          <a:fillRef idx="3">
+            <a:schemeClr val="accent1"/>
+          </a:fillRef>
+          <a:effectRef idx="2">
+            <a:schemeClr val="accent1"/>
+          </a:effectRef>
+          <a:fontRef idx="minor">
+            <a:schemeClr val="lt1"/>
+          </a:fontRef>
+        </p:style>
+        <p:txBody>
+          <a:bodyPr rtlCol="0" anchor="ctr"/>
+          <a:lstStyle/>
+          <a:p>
+            <a:pPr algn="ctr"/>
+          </a:p>
+        </p:txBody>
+      </p:sp>
+      <p:sp>
+        <p:nvSpPr>
+          <p:cNvPr id="5" name="TextBox 4"/>
+          <p:cNvSpPr txBox="1"/>
+          <p:nvPr/>
+        </p:nvSpPr>
+        <p:spPr>
+          <a:xfrm>
+            <a:off x="685800" y="1583944"/>
+            <a:ext cx="10820095" cy="386842"/>
+          </a:xfrm>
+          <a:prstGeom prst="rect">
+            <a:avLst/>
+          </a:prstGeom>
+          <a:noFill/>
+        </p:spPr>
+        <p:txBody>
+          <a:bodyPr wrap="square" anchor="t" lIns="0" rIns="0" tIns="0" bIns="0">
+            <a:noAutofit/>
+          </a:bodyPr>
+          <a:lstStyle/>
+          <a:p>
+            <a:pPr algn="l">
+              <a:lnSpc>
+                <a:spcPct val="130000"/>
+              </a:lnSpc>
+            </a:pPr>
+            <a:r>
+              <a:rPr sz="1900" b="0" i="1">
+                <a:solidFill>
+                  <a:srgbClr val="595959"/>
+                </a:solidFill>
+                <a:latin typeface="Calibri"/>
+                <a:ea typeface="Microsoft YaHei"/>
+                <a:cs typeface="Microsoft YaHei"/>
+              </a:rPr>
+              <a:t>已上线且功能正确，和第一眼就值得信任，是两个不同的结论。</a:t>
+            </a:r>
+          </a:p>
+        </p:txBody>
+      </p:sp>
+      <p:sp>
+        <p:nvSpPr>
+          <p:cNvPr id="6" name="Rectangle 5"/>
+          <p:cNvSpPr/>
+          <p:nvPr/>
+        </p:nvSpPr>
+        <p:spPr>
+          <a:xfrm>
+            <a:off x="685800" y="2098802"/>
+            <a:ext cx="10820095" cy="446277"/>
+          </a:xfrm>
+          <a:prstGeom prst="rect">
+            <a:avLst/>
+          </a:prstGeom>
+          <a:solidFill>
+            <a:srgbClr val="1F4E78"/>
+          </a:solidFill>
+          <a:ln>
+            <a:noFill/>
+          </a:ln>
+          <a:effectLst/>
+        </p:spPr>
+        <p:style>
+          <a:lnRef idx="1">
+            <a:schemeClr val="accent1"/>
+          </a:lnRef>
+          <a:fillRef idx="3">
+            <a:schemeClr val="accent1"/>
+          </a:fillRef>
+          <a:effectRef idx="2">
+            <a:schemeClr val="accent1"/>
+          </a:effectRef>
+          <a:fontRef idx="minor">
+            <a:schemeClr val="lt1"/>
+          </a:fontRef>
+        </p:style>
+        <p:txBody>
+          <a:bodyPr rtlCol="0" anchor="ctr"/>
+          <a:lstStyle/>
+          <a:p>
+            <a:pPr algn="ctr"/>
+          </a:p>
+        </p:txBody>
+      </p:sp>
+      <p:sp>
+        <p:nvSpPr>
+          <p:cNvPr id="7" name="TextBox 6"/>
+          <p:cNvSpPr txBox="1"/>
+          <p:nvPr/>
+        </p:nvSpPr>
+        <p:spPr>
+          <a:xfrm>
+            <a:off x="813816" y="2171954"/>
+            <a:ext cx="4823808" cy="336549"/>
+          </a:xfrm>
+          <a:prstGeom prst="rect">
+            <a:avLst/>
+          </a:prstGeom>
+          <a:noFill/>
+        </p:spPr>
+        <p:txBody>
+          <a:bodyPr wrap="square" anchor="t" lIns="0" rIns="0" tIns="0" bIns="0">
+            <a:noAutofit/>
+          </a:bodyPr>
+          <a:lstStyle/>
+          <a:p>
+            <a:pPr algn="l"/>
+            <a:r>
+              <a:rPr sz="1700" b="1" i="0">
+                <a:solidFill>
+                  <a:srgbClr val="FFFFFF"/>
+                </a:solidFill>
+                <a:latin typeface="Calibri"/>
+                <a:ea typeface="Microsoft YaHei"/>
+                <a:cs typeface="Microsoft YaHei"/>
+              </a:rPr>
+              <a:t>发现的差距</a:t>
+            </a:r>
+          </a:p>
+        </p:txBody>
+      </p:sp>
+      <p:sp>
+        <p:nvSpPr>
+          <p:cNvPr id="8" name="TextBox 7"/>
+          <p:cNvSpPr txBox="1"/>
+          <p:nvPr/>
+        </p:nvSpPr>
+        <p:spPr>
+          <a:xfrm>
+            <a:off x="5857080" y="2171954"/>
+            <a:ext cx="5557374" cy="336549"/>
+          </a:xfrm>
+          <a:prstGeom prst="rect">
+            <a:avLst/>
+          </a:prstGeom>
+          <a:noFill/>
+        </p:spPr>
+        <p:txBody>
+          <a:bodyPr wrap="square" anchor="t" lIns="0" rIns="0" tIns="0" bIns="0">
+            <a:noAutofit/>
+          </a:bodyPr>
+          <a:lstStyle/>
+          <a:p>
+            <a:pPr algn="l"/>
+            <a:r>
+              <a:rPr sz="1700" b="1" i="0">
+                <a:solidFill>
+                  <a:srgbClr val="FFFFFF"/>
+                </a:solidFill>
+                <a:latin typeface="Calibri"/>
+                <a:ea typeface="Microsoft YaHei"/>
+                <a:cs typeface="Microsoft YaHei"/>
+              </a:rPr>
+              <a:t>上线的修复</a:t>
+            </a:r>
+          </a:p>
+        </p:txBody>
+      </p:sp>
+      <p:sp>
+        <p:nvSpPr>
+          <p:cNvPr id="9" name="TextBox 8"/>
+          <p:cNvSpPr txBox="1"/>
+          <p:nvPr/>
+        </p:nvSpPr>
+        <p:spPr>
+          <a:xfrm>
+            <a:off x="813816" y="2618231"/>
+            <a:ext cx="4823808" cy="718312"/>
+          </a:xfrm>
+          <a:prstGeom prst="rect">
+            <a:avLst/>
+          </a:prstGeom>
+          <a:noFill/>
+        </p:spPr>
+        <p:txBody>
+          <a:bodyPr wrap="square" anchor="t" lIns="0" rIns="0" tIns="0" bIns="0">
+            <a:noAutofit/>
+          </a:bodyPr>
+          <a:lstStyle/>
+          <a:p>
+            <a:pPr algn="l">
+              <a:lnSpc>
+                <a:spcPct val="115000"/>
+              </a:lnSpc>
+            </a:pPr>
+            <a:r>
+              <a:rPr sz="2200" b="0" i="0">
+                <a:solidFill>
+                  <a:srgbClr val="000000"/>
+                </a:solidFill>
+                <a:latin typeface="Calibri"/>
+                <a:ea typeface="Microsoft YaHei"/>
+                <a:cs typeface="Microsoft YaHei"/>
+              </a:rPr>
+              <a:t>没有头部或导航</a:t>
+            </a:r>
+          </a:p>
+        </p:txBody>
+      </p:sp>
+      <p:sp>
+        <p:nvSpPr>
+          <p:cNvPr id="10" name="TextBox 9"/>
+          <p:cNvSpPr txBox="1"/>
+          <p:nvPr/>
+        </p:nvSpPr>
+        <p:spPr>
+          <a:xfrm>
+            <a:off x="5857080" y="2618231"/>
+            <a:ext cx="5557374" cy="718312"/>
+          </a:xfrm>
+          <a:prstGeom prst="rect">
+            <a:avLst/>
+          </a:prstGeom>
+          <a:noFill/>
+        </p:spPr>
+        <p:txBody>
+          <a:bodyPr wrap="square" anchor="t" lIns="0" rIns="0" tIns="0" bIns="0">
+            <a:noAutofit/>
+          </a:bodyPr>
+          <a:lstStyle/>
+          <a:p>
+            <a:pPr algn="l">
+              <a:lnSpc>
+                <a:spcPct val="115000"/>
+              </a:lnSpc>
+            </a:pPr>
+            <a:r>
+              <a:rPr sz="2200" b="0" i="0">
+                <a:solidFill>
+                  <a:srgbClr val="000000"/>
+                </a:solidFill>
+                <a:latin typeface="Calibri"/>
+                <a:ea typeface="Microsoft YaHei"/>
+                <a:cs typeface="Microsoft YaHei"/>
+              </a:rPr>
+              <a:t>持久化头部；Single Tweet / Thread 现已互相链接</a:t>
+            </a:r>
+          </a:p>
+        </p:txBody>
+      </p:sp>
+      <p:sp>
+        <p:nvSpPr>
+          <p:cNvPr id="11" name="Rectangle 10"/>
+          <p:cNvSpPr/>
+          <p:nvPr/>
+        </p:nvSpPr>
+        <p:spPr>
+          <a:xfrm>
+            <a:off x="685800" y="3373119"/>
+            <a:ext cx="10820095" cy="9525"/>
+          </a:xfrm>
+          <a:prstGeom prst="rect">
+            <a:avLst/>
+          </a:prstGeom>
+          <a:solidFill>
+            <a:srgbClr val="D8DEE4"/>
+          </a:solidFill>
+          <a:ln>
+            <a:noFill/>
+          </a:ln>
+          <a:effectLst/>
+        </p:spPr>
+        <p:style>
+          <a:lnRef idx="1">
+            <a:schemeClr val="accent1"/>
+          </a:lnRef>
+          <a:fillRef idx="3">
+            <a:schemeClr val="accent1"/>
+          </a:fillRef>
+          <a:effectRef idx="2">
+            <a:schemeClr val="accent1"/>
+          </a:effectRef>
+          <a:fontRef idx="minor">
+            <a:schemeClr val="lt1"/>
+          </a:fontRef>
+        </p:style>
+        <p:txBody>
+          <a:bodyPr rtlCol="0" anchor="ctr"/>
+          <a:lstStyle/>
+          <a:p>
+            <a:pPr algn="ctr"/>
+          </a:p>
+        </p:txBody>
+      </p:sp>
+      <p:sp>
+        <p:nvSpPr>
+          <p:cNvPr id="12" name="Rectangle 11"/>
+          <p:cNvSpPr/>
+          <p:nvPr/>
+        </p:nvSpPr>
+        <p:spPr>
+          <a:xfrm>
+            <a:off x="685800" y="3373119"/>
+            <a:ext cx="10820095" cy="828040"/>
+          </a:xfrm>
+          <a:prstGeom prst="rect">
+            <a:avLst/>
+          </a:prstGeom>
+          <a:solidFill>
+            <a:srgbClr val="F2F2F2"/>
+          </a:solidFill>
+          <a:ln>
+            <a:noFill/>
+          </a:ln>
+          <a:effectLst/>
+        </p:spPr>
+        <p:style>
+          <a:lnRef idx="1">
+            <a:schemeClr val="accent1"/>
+          </a:lnRef>
+          <a:fillRef idx="3">
+            <a:schemeClr val="accent1"/>
+          </a:fillRef>
+          <a:effectRef idx="2">
+            <a:schemeClr val="accent1"/>
+          </a:effectRef>
+          <a:fontRef idx="minor">
+            <a:schemeClr val="lt1"/>
+          </a:fontRef>
+        </p:style>
+        <p:txBody>
+          <a:bodyPr rtlCol="0" anchor="ctr"/>
+          <a:lstStyle/>
+          <a:p>
+            <a:pPr algn="ctr"/>
+          </a:p>
+        </p:txBody>
+      </p:sp>
+      <p:sp>
+        <p:nvSpPr>
+          <p:cNvPr id="13" name="TextBox 12"/>
+          <p:cNvSpPr txBox="1"/>
+          <p:nvPr/>
+        </p:nvSpPr>
+        <p:spPr>
+          <a:xfrm>
+            <a:off x="813816" y="3446271"/>
+            <a:ext cx="4823808" cy="718312"/>
+          </a:xfrm>
+          <a:prstGeom prst="rect">
+            <a:avLst/>
+          </a:prstGeom>
+          <a:noFill/>
+        </p:spPr>
+        <p:txBody>
+          <a:bodyPr wrap="square" anchor="t" lIns="0" rIns="0" tIns="0" bIns="0">
+            <a:noAutofit/>
+          </a:bodyPr>
+          <a:lstStyle/>
+          <a:p>
+            <a:pPr algn="l">
+              <a:lnSpc>
+                <a:spcPct val="115000"/>
+              </a:lnSpc>
+            </a:pPr>
+            <a:r>
+              <a:rPr sz="2200" b="0" i="0">
+                <a:solidFill>
+                  <a:srgbClr val="000000"/>
+                </a:solidFill>
+                <a:latin typeface="Calibri"/>
+                <a:ea typeface="Microsoft YaHei"/>
+                <a:cs typeface="Microsoft YaHei"/>
+              </a:rPr>
+              <a:t>朴素、无样式的输入框</a:t>
+            </a:r>
+          </a:p>
+        </p:txBody>
+      </p:sp>
+      <p:sp>
+        <p:nvSpPr>
+          <p:cNvPr id="14" name="TextBox 13"/>
+          <p:cNvSpPr txBox="1"/>
+          <p:nvPr/>
+        </p:nvSpPr>
+        <p:spPr>
+          <a:xfrm>
+            <a:off x="5857080" y="3446271"/>
+            <a:ext cx="5557374" cy="718312"/>
+          </a:xfrm>
+          <a:prstGeom prst="rect">
+            <a:avLst/>
+          </a:prstGeom>
+          <a:noFill/>
+        </p:spPr>
+        <p:txBody>
+          <a:bodyPr wrap="square" anchor="t" lIns="0" rIns="0" tIns="0" bIns="0">
+            <a:noAutofit/>
+          </a:bodyPr>
+          <a:lstStyle/>
+          <a:p>
+            <a:pPr algn="l">
+              <a:lnSpc>
+                <a:spcPct val="115000"/>
+              </a:lnSpc>
+            </a:pPr>
+            <a:r>
+              <a:rPr sz="2200" b="0" i="0">
+                <a:solidFill>
+                  <a:srgbClr val="000000"/>
+                </a:solidFill>
+                <a:latin typeface="Calibri"/>
+                <a:ea typeface="Microsoft YaHei"/>
+                <a:cs typeface="Microsoft YaHei"/>
+              </a:rPr>
+              <a:t>已样式化的控件，预览+检查面板两栏布局</a:t>
+            </a:r>
+          </a:p>
+        </p:txBody>
+      </p:sp>
+      <p:sp>
+        <p:nvSpPr>
+          <p:cNvPr id="15" name="Rectangle 14"/>
+          <p:cNvSpPr/>
+          <p:nvPr/>
+        </p:nvSpPr>
+        <p:spPr>
+          <a:xfrm>
+            <a:off x="685800" y="4201159"/>
+            <a:ext cx="10820095" cy="9525"/>
+          </a:xfrm>
+          <a:prstGeom prst="rect">
+            <a:avLst/>
+          </a:prstGeom>
+          <a:solidFill>
+            <a:srgbClr val="D8DEE4"/>
+          </a:solidFill>
+          <a:ln>
+            <a:noFill/>
+          </a:ln>
+          <a:effectLst/>
+        </p:spPr>
+        <p:style>
+          <a:lnRef idx="1">
+            <a:schemeClr val="accent1"/>
+          </a:lnRef>
+          <a:fillRef idx="3">
+            <a:schemeClr val="accent1"/>
+          </a:fillRef>
+          <a:effectRef idx="2">
+            <a:schemeClr val="accent1"/>
+          </a:effectRef>
+          <a:fontRef idx="minor">
+            <a:schemeClr val="lt1"/>
+          </a:fontRef>
+        </p:style>
+        <p:txBody>
+          <a:bodyPr rtlCol="0" anchor="ctr"/>
+          <a:lstStyle/>
+          <a:p>
+            <a:pPr algn="ctr"/>
+          </a:p>
+        </p:txBody>
+      </p:sp>
+      <p:sp>
+        <p:nvSpPr>
+          <p:cNvPr id="16" name="TextBox 15"/>
+          <p:cNvSpPr txBox="1"/>
+          <p:nvPr/>
+        </p:nvSpPr>
+        <p:spPr>
+          <a:xfrm>
+            <a:off x="813816" y="4274311"/>
+            <a:ext cx="4823808" cy="377444"/>
+          </a:xfrm>
+          <a:prstGeom prst="rect">
+            <a:avLst/>
+          </a:prstGeom>
+          <a:noFill/>
+        </p:spPr>
+        <p:txBody>
+          <a:bodyPr wrap="square" anchor="t" lIns="0" rIns="0" tIns="0" bIns="0">
+            <a:noAutofit/>
+          </a:bodyPr>
+          <a:lstStyle/>
+          <a:p>
+            <a:pPr algn="l">
+              <a:lnSpc>
+                <a:spcPct val="115000"/>
+              </a:lnSpc>
+            </a:pPr>
+            <a:r>
+              <a:rPr sz="2200" b="0" i="0">
+                <a:solidFill>
+                  <a:srgbClr val="000000"/>
+                </a:solidFill>
+                <a:latin typeface="Calibri"/>
+                <a:ea typeface="Microsoft YaHei"/>
+                <a:cs typeface="Microsoft YaHei"/>
+              </a:rPr>
+              <a:t>三个导出按钮，权重相同</a:t>
+            </a:r>
+          </a:p>
+        </p:txBody>
+      </p:sp>
+      <p:sp>
+        <p:nvSpPr>
+          <p:cNvPr id="17" name="TextBox 16"/>
+          <p:cNvSpPr txBox="1"/>
+          <p:nvPr/>
+        </p:nvSpPr>
+        <p:spPr>
+          <a:xfrm>
+            <a:off x="5857080" y="4274311"/>
+            <a:ext cx="5557374" cy="377444"/>
+          </a:xfrm>
+          <a:prstGeom prst="rect">
+            <a:avLst/>
+          </a:prstGeom>
+          <a:noFill/>
+        </p:spPr>
+        <p:txBody>
+          <a:bodyPr wrap="square" anchor="t" lIns="0" rIns="0" tIns="0" bIns="0">
+            <a:noAutofit/>
+          </a:bodyPr>
+          <a:lstStyle/>
+          <a:p>
+            <a:pPr algn="l">
+              <a:lnSpc>
+                <a:spcPct val="115000"/>
+              </a:lnSpc>
+            </a:pPr>
+            <a:r>
+              <a:rPr sz="2200" b="0" i="0">
+                <a:solidFill>
+                  <a:srgbClr val="000000"/>
+                </a:solidFill>
+                <a:latin typeface="Calibri"/>
+                <a:ea typeface="Microsoft YaHei"/>
+                <a:cs typeface="Microsoft YaHei"/>
+              </a:rPr>
+              <a:t>一个主要操作，两个明显次要的操作</a:t>
+            </a:r>
+          </a:p>
+        </p:txBody>
+      </p:sp>
+      <p:sp>
+        <p:nvSpPr>
+          <p:cNvPr id="18" name="Rectangle 17"/>
+          <p:cNvSpPr/>
+          <p:nvPr/>
+        </p:nvSpPr>
+        <p:spPr>
+          <a:xfrm>
+            <a:off x="685800" y="4688331"/>
+            <a:ext cx="10820095" cy="9525"/>
+          </a:xfrm>
+          <a:prstGeom prst="rect">
+            <a:avLst/>
+          </a:prstGeom>
+          <a:solidFill>
+            <a:srgbClr val="D8DEE4"/>
+          </a:solidFill>
+          <a:ln>
+            <a:noFill/>
+          </a:ln>
+          <a:effectLst/>
+        </p:spPr>
+        <p:style>
+          <a:lnRef idx="1">
+            <a:schemeClr val="accent1"/>
+          </a:lnRef>
+          <a:fillRef idx="3">
+            <a:schemeClr val="accent1"/>
+          </a:fillRef>
+          <a:effectRef idx="2">
+            <a:schemeClr val="accent1"/>
+          </a:effectRef>
+          <a:fontRef idx="minor">
+            <a:schemeClr val="lt1"/>
+          </a:fontRef>
+        </p:style>
+        <p:txBody>
+          <a:bodyPr rtlCol="0" anchor="ctr"/>
+          <a:lstStyle/>
+          <a:p>
+            <a:pPr algn="ctr"/>
+          </a:p>
+        </p:txBody>
+      </p:sp>
+      <p:sp>
+        <p:nvSpPr>
+          <p:cNvPr id="19" name="Rectangle 18"/>
+          <p:cNvSpPr/>
+          <p:nvPr/>
+        </p:nvSpPr>
+        <p:spPr>
+          <a:xfrm>
+            <a:off x="685800" y="4688331"/>
+            <a:ext cx="10820095" cy="828040"/>
+          </a:xfrm>
+          <a:prstGeom prst="rect">
+            <a:avLst/>
+          </a:prstGeom>
+          <a:solidFill>
+            <a:srgbClr val="F2F2F2"/>
+          </a:solidFill>
+          <a:ln>
+            <a:noFill/>
+          </a:ln>
+          <a:effectLst/>
+        </p:spPr>
+        <p:style>
+          <a:lnRef idx="1">
+            <a:schemeClr val="accent1"/>
+          </a:lnRef>
+          <a:fillRef idx="3">
+            <a:schemeClr val="accent1"/>
+          </a:fillRef>
+          <a:effectRef idx="2">
+            <a:schemeClr val="accent1"/>
+          </a:effectRef>
+          <a:fontRef idx="minor">
+            <a:schemeClr val="lt1"/>
+          </a:fontRef>
+        </p:style>
+        <p:txBody>
+          <a:bodyPr rtlCol="0" anchor="ctr"/>
+          <a:lstStyle/>
+          <a:p>
+            <a:pPr algn="ctr"/>
+          </a:p>
+        </p:txBody>
+      </p:sp>
+      <p:sp>
+        <p:nvSpPr>
+          <p:cNvPr id="20" name="TextBox 19"/>
+          <p:cNvSpPr txBox="1"/>
+          <p:nvPr/>
+        </p:nvSpPr>
+        <p:spPr>
+          <a:xfrm>
+            <a:off x="813816" y="4761483"/>
+            <a:ext cx="4823808" cy="718312"/>
+          </a:xfrm>
+          <a:prstGeom prst="rect">
+            <a:avLst/>
+          </a:prstGeom>
+          <a:noFill/>
+        </p:spPr>
+        <p:txBody>
+          <a:bodyPr wrap="square" anchor="t" lIns="0" rIns="0" tIns="0" bIns="0">
+            <a:noAutofit/>
+          </a:bodyPr>
+          <a:lstStyle/>
+          <a:p>
+            <a:pPr algn="l">
+              <a:lnSpc>
+                <a:spcPct val="115000"/>
+              </a:lnSpc>
+            </a:pPr>
+            <a:r>
+              <a:rPr sz="2200" b="0" i="0">
+                <a:solidFill>
+                  <a:srgbClr val="000000"/>
+                </a:solidFill>
+                <a:latin typeface="Calibri"/>
+                <a:ea typeface="Microsoft YaHei"/>
+                <a:cs typeface="Microsoft YaHei"/>
+              </a:rPr>
+              <a:t>375px 下的水平溢出（已确认的 bug）</a:t>
+            </a:r>
+          </a:p>
+        </p:txBody>
+      </p:sp>
+      <p:sp>
+        <p:nvSpPr>
+          <p:cNvPr id="21" name="TextBox 20"/>
+          <p:cNvSpPr txBox="1"/>
+          <p:nvPr/>
+        </p:nvSpPr>
+        <p:spPr>
+          <a:xfrm>
+            <a:off x="5857080" y="4761483"/>
+            <a:ext cx="5557374" cy="718312"/>
+          </a:xfrm>
+          <a:prstGeom prst="rect">
+            <a:avLst/>
+          </a:prstGeom>
+          <a:noFill/>
+        </p:spPr>
+        <p:txBody>
+          <a:bodyPr wrap="square" anchor="t" lIns="0" rIns="0" tIns="0" bIns="0">
+            <a:noAutofit/>
+          </a:bodyPr>
+          <a:lstStyle/>
+          <a:p>
+            <a:pPr algn="l">
+              <a:lnSpc>
+                <a:spcPct val="115000"/>
+              </a:lnSpc>
+            </a:pPr>
+            <a:r>
+              <a:rPr sz="2200" b="0" i="0">
+                <a:solidFill>
+                  <a:srgbClr val="000000"/>
+                </a:solidFill>
+                <a:latin typeface="Calibri"/>
+                <a:ea typeface="Microsoft YaHei"/>
+                <a:cs typeface="Microsoft YaHei"/>
+              </a:rPr>
+              <a:t>已修复；已机械化重新验证</a:t>
+            </a:r>
+          </a:p>
+        </p:txBody>
+      </p:sp>
+      <p:sp>
+        <p:nvSpPr>
+          <p:cNvPr id="22" name="Rectangle 21"/>
+          <p:cNvSpPr/>
+          <p:nvPr/>
+        </p:nvSpPr>
+        <p:spPr>
+          <a:xfrm>
+            <a:off x="685800" y="5516371"/>
+            <a:ext cx="10820095" cy="9525"/>
+          </a:xfrm>
+          <a:prstGeom prst="rect">
+            <a:avLst/>
+          </a:prstGeom>
+          <a:solidFill>
+            <a:srgbClr val="D8DEE4"/>
+          </a:solidFill>
+          <a:ln>
+            <a:noFill/>
+          </a:ln>
+          <a:effectLst/>
+        </p:spPr>
+        <p:style>
+          <a:lnRef idx="1">
+            <a:schemeClr val="accent1"/>
+          </a:lnRef>
+          <a:fillRef idx="3">
+            <a:schemeClr val="accent1"/>
+          </a:fillRef>
+          <a:effectRef idx="2">
+            <a:schemeClr val="accent1"/>
+          </a:effectRef>
+          <a:fontRef idx="minor">
+            <a:schemeClr val="lt1"/>
+          </a:fontRef>
+        </p:style>
+        <p:txBody>
+          <a:bodyPr rtlCol="0" anchor="ctr"/>
+          <a:lstStyle/>
+          <a:p>
+            <a:pPr algn="ctr"/>
+          </a:p>
+        </p:txBody>
+      </p:sp>
+      <p:sp>
+        <p:nvSpPr>
+          <p:cNvPr id="23" name="TextBox 22"/>
+          <p:cNvSpPr txBox="1"/>
+          <p:nvPr/>
+        </p:nvSpPr>
+        <p:spPr>
+          <a:xfrm>
+            <a:off x="685800" y="6355080"/>
+            <a:ext cx="9601200" cy="274320"/>
+          </a:xfrm>
+          <a:prstGeom prst="rect">
+            <a:avLst/>
+          </a:prstGeom>
+          <a:noFill/>
+        </p:spPr>
+        <p:txBody>
+          <a:bodyPr wrap="square" anchor="t" lIns="0" rIns="0" tIns="0" bIns="0">
+            <a:noAutofit/>
+          </a:bodyPr>
+          <a:lstStyle/>
+          <a:p>
+            <a:pPr algn="l"/>
+            <a:r>
+              <a:rPr sz="1200" b="0" i="1">
+                <a:solidFill>
+                  <a:srgbClr val="808080"/>
+                </a:solidFill>
+                <a:latin typeface="Calibri"/>
+                <a:ea typeface="Microsoft YaHei"/>
+                <a:cs typeface="Microsoft YaHei"/>
+              </a:rPr>
+              <a:t>docs/DESIGN_REVIEW_4_1_HUMAN_REVIEW.md；docs/DESIGN_REVIEW_4_1_RELEASE.md</a:t>
+            </a:r>
+          </a:p>
+        </p:txBody>
+      </p:sp>
+      <p:sp>
+        <p:nvSpPr>
+          <p:cNvPr id="24" name="TextBox 23"/>
+          <p:cNvSpPr txBox="1"/>
+          <p:nvPr/>
+        </p:nvSpPr>
+        <p:spPr>
+          <a:xfrm>
+            <a:off x="10591495" y="6355080"/>
+            <a:ext cx="914400" cy="274320"/>
+          </a:xfrm>
+          <a:prstGeom prst="rect">
+            <a:avLst/>
+          </a:prstGeom>
+          <a:noFill/>
+        </p:spPr>
+        <p:txBody>
+          <a:bodyPr wrap="square" anchor="t" lIns="0" rIns="0" tIns="0" bIns="0">
+            <a:noAutofit/>
+          </a:bodyPr>
+          <a:lstStyle/>
+          <a:p>
+            <a:pPr algn="l"/>
+            <a:r>
+              <a:rPr sz="1200" b="0" i="0">
+                <a:solidFill>
+                  <a:srgbClr val="808080"/>
+                </a:solidFill>
+                <a:latin typeface="Calibri"/>
+                <a:ea typeface="Microsoft YaHei"/>
+                <a:cs typeface="Microsoft YaHei"/>
+              </a:rPr>
+              <a:t>20</a:t>
+            </a:r>
+          </a:p>
+        </p:txBody>
+      </p:sp>
+    </p:spTree>
+  </p:cSld>
+  <p:clrMapOvr>
+    <a:masterClrMapping/>
+  </p:clrMapOvr>
+</p:sld>
+</file>
+
+<file path=ppt/slides/slide22.xml><?xml version="1.0" encoding="utf-8"?>
+<p:sld xmlns:a="http://schemas.openxmlformats.org/drawingml/2006/main" xmlns:p="http://schemas.openxmlformats.org/presentationml/2006/main" xmlns:r="http://schemas.openxmlformats.org/officeDocument/2006/relationships">
+  <p:cSld>
+    <p:spTree>
+      <p:nvGrpSpPr>
+        <p:cNvPr id="1" name=""/>
+        <p:cNvGrpSpPr/>
+        <p:nvPr/>
+      </p:nvGrpSpPr>
+      <p:grpSpPr/>
+      <p:sp>
+        <p:nvSpPr>
+          <p:cNvPr id="2" name="TextBox 1"/>
+          <p:cNvSpPr txBox="1"/>
+          <p:nvPr/>
+        </p:nvSpPr>
+        <p:spPr>
+          <a:xfrm>
+            <a:off x="685800" y="457200"/>
+            <a:ext cx="10820095" cy="274320"/>
+          </a:xfrm>
+          <a:prstGeom prst="rect">
+            <a:avLst/>
+          </a:prstGeom>
+          <a:noFill/>
+        </p:spPr>
+        <p:txBody>
+          <a:bodyPr wrap="square" anchor="t" lIns="0" rIns="0" tIns="0" bIns="0">
+            <a:noAutofit/>
+          </a:bodyPr>
+          <a:lstStyle/>
+          <a:p>
+            <a:pPr algn="l"/>
+            <a:r>
+              <a:rPr sz="1600" b="1" i="0">
+                <a:solidFill>
+                  <a:srgbClr val="1F4E78"/>
+                </a:solidFill>
+                <a:latin typeface="Calibri"/>
+                <a:ea typeface="Microsoft YaHei"/>
+                <a:cs typeface="Microsoft YaHei"/>
+              </a:rPr>
+              <a:t>教程 4.1 —— X BROADCAST 的边界</a:t>
+            </a:r>
+          </a:p>
+        </p:txBody>
+      </p:sp>
+      <p:sp>
+        <p:nvSpPr>
+          <p:cNvPr id="3" name="TextBox 2"/>
+          <p:cNvSpPr txBox="1"/>
+          <p:nvPr/>
+        </p:nvSpPr>
+        <p:spPr>
+          <a:xfrm>
+            <a:off x="685800" y="786384"/>
+            <a:ext cx="10820095" cy="1037335"/>
+          </a:xfrm>
+          <a:prstGeom prst="rect">
+            <a:avLst/>
+          </a:prstGeom>
+          <a:noFill/>
+        </p:spPr>
+        <p:txBody>
+          <a:bodyPr wrap="square" anchor="t" lIns="0" rIns="0" tIns="0" bIns="0">
+            <a:noAutofit/>
+          </a:bodyPr>
+          <a:lstStyle/>
+          <a:p>
+            <a:pPr algn="l">
+              <a:lnSpc>
+                <a:spcPct val="108000"/>
+              </a:lnSpc>
+            </a:pPr>
+            <a:r>
+              <a:rPr sz="3200" b="1" i="0">
+                <a:solidFill>
+                  <a:srgbClr val="1F4E78"/>
+                </a:solidFill>
+                <a:latin typeface="Calibri"/>
+                <a:ea typeface="Microsoft YaHei"/>
+                <a:cs typeface="Microsoft YaHei"/>
+              </a:rPr>
+              <a:t>在修复一个缺失的输出之前，先找到它消失的那一层</a:t>
+            </a:r>
+          </a:p>
+        </p:txBody>
+      </p:sp>
+      <p:sp>
+        <p:nvSpPr>
+          <p:cNvPr id="4" name="Rectangle 3"/>
+          <p:cNvSpPr/>
+          <p:nvPr/>
+        </p:nvSpPr>
+        <p:spPr>
+          <a:xfrm>
+            <a:off x="685800" y="1933447"/>
+            <a:ext cx="10820095" cy="9525"/>
+          </a:xfrm>
+          <a:prstGeom prst="rect">
+            <a:avLst/>
+          </a:prstGeom>
+          <a:solidFill>
+            <a:srgbClr val="1F4E78"/>
+          </a:solidFill>
+          <a:ln>
+            <a:noFill/>
+          </a:ln>
+          <a:effectLst/>
+        </p:spPr>
+        <p:style>
+          <a:lnRef idx="1">
+            <a:schemeClr val="accent1"/>
+          </a:lnRef>
+          <a:fillRef idx="3">
+            <a:schemeClr val="accent1"/>
+          </a:fillRef>
+          <a:effectRef idx="2">
+            <a:schemeClr val="accent1"/>
+          </a:effectRef>
+          <a:fontRef idx="minor">
+            <a:schemeClr val="lt1"/>
+          </a:fontRef>
+        </p:style>
+        <p:txBody>
+          <a:bodyPr rtlCol="0" anchor="ctr"/>
+          <a:lstStyle/>
+          <a:p>
+            <a:pPr algn="ctr"/>
+          </a:p>
+        </p:txBody>
+      </p:sp>
+      <p:sp>
+        <p:nvSpPr>
+          <p:cNvPr id="5" name="TextBox 4"/>
+          <p:cNvSpPr txBox="1"/>
+          <p:nvPr/>
+        </p:nvSpPr>
+        <p:spPr>
+          <a:xfrm>
+            <a:off x="685800" y="2079751"/>
+            <a:ext cx="10820095" cy="700532"/>
+          </a:xfrm>
+          <a:prstGeom prst="rect">
+            <a:avLst/>
+          </a:prstGeom>
+          <a:noFill/>
+        </p:spPr>
+        <p:txBody>
+          <a:bodyPr wrap="square" anchor="t" lIns="0" rIns="0" tIns="0" bIns="0">
+            <a:noAutofit/>
+          </a:bodyPr>
+          <a:lstStyle/>
+          <a:p>
+            <a:pPr algn="l">
+              <a:lnSpc>
+                <a:spcPct val="130000"/>
+              </a:lnSpc>
+            </a:pPr>
+            <a:r>
+              <a:rPr sz="1900" b="0" i="1">
+                <a:solidFill>
+                  <a:srgbClr val="595959"/>
+                </a:solidFill>
+                <a:latin typeface="Calibri"/>
+                <a:ea typeface="Microsoft YaHei"/>
+                <a:cs typeface="Microsoft YaHei"/>
+              </a:rPr>
+              <a:t>X 的免费 syndication 数据从未包含 broadcast 卡片元数据——这是通过直接读取原始数据确认的，不是猜测。</a:t>
+            </a:r>
+          </a:p>
+        </p:txBody>
+      </p:sp>
+      <p:sp>
+        <p:nvSpPr>
+          <p:cNvPr id="6" name="Rectangle 5"/>
+          <p:cNvSpPr/>
+          <p:nvPr/>
+        </p:nvSpPr>
+        <p:spPr>
+          <a:xfrm>
+            <a:off x="685800" y="2908299"/>
+            <a:ext cx="10820095" cy="446277"/>
+          </a:xfrm>
+          <a:prstGeom prst="rect">
+            <a:avLst/>
+          </a:prstGeom>
+          <a:solidFill>
+            <a:srgbClr val="1F4E78"/>
+          </a:solidFill>
+          <a:ln>
+            <a:noFill/>
+          </a:ln>
+          <a:effectLst/>
+        </p:spPr>
+        <p:style>
+          <a:lnRef idx="1">
+            <a:schemeClr val="accent1"/>
+          </a:lnRef>
+          <a:fillRef idx="3">
+            <a:schemeClr val="accent1"/>
+          </a:fillRef>
+          <a:effectRef idx="2">
+            <a:schemeClr val="accent1"/>
+          </a:effectRef>
+          <a:fontRef idx="minor">
+            <a:schemeClr val="lt1"/>
+          </a:fontRef>
+        </p:style>
+        <p:txBody>
+          <a:bodyPr rtlCol="0" anchor="ctr"/>
+          <a:lstStyle/>
+          <a:p>
+            <a:pPr algn="ctr"/>
+          </a:p>
+        </p:txBody>
+      </p:sp>
+      <p:sp>
+        <p:nvSpPr>
+          <p:cNvPr id="7" name="TextBox 6"/>
+          <p:cNvSpPr txBox="1"/>
+          <p:nvPr/>
+        </p:nvSpPr>
+        <p:spPr>
+          <a:xfrm>
+            <a:off x="813816" y="2981451"/>
+            <a:ext cx="3906851" cy="336549"/>
+          </a:xfrm>
+          <a:prstGeom prst="rect">
+            <a:avLst/>
+          </a:prstGeom>
+          <a:noFill/>
+        </p:spPr>
+        <p:txBody>
+          <a:bodyPr wrap="square" anchor="t" lIns="0" rIns="0" tIns="0" bIns="0">
+            <a:noAutofit/>
+          </a:bodyPr>
+          <a:lstStyle/>
+          <a:p>
+            <a:pPr algn="l"/>
+            <a:r>
+              <a:rPr sz="1700" b="1" i="0">
+                <a:solidFill>
+                  <a:srgbClr val="FFFFFF"/>
+                </a:solidFill>
+                <a:latin typeface="Calibri"/>
+                <a:ea typeface="Microsoft YaHei"/>
+                <a:cs typeface="Microsoft YaHei"/>
+              </a:rPr>
+              <a:t>层</a:t>
+            </a:r>
+          </a:p>
+        </p:txBody>
+      </p:sp>
+      <p:sp>
+        <p:nvSpPr>
+          <p:cNvPr id="8" name="TextBox 7"/>
+          <p:cNvSpPr txBox="1"/>
+          <p:nvPr/>
+        </p:nvSpPr>
+        <p:spPr>
+          <a:xfrm>
+            <a:off x="4940123" y="2981451"/>
+            <a:ext cx="6474331" cy="336549"/>
+          </a:xfrm>
+          <a:prstGeom prst="rect">
+            <a:avLst/>
+          </a:prstGeom>
+          <a:noFill/>
+        </p:spPr>
+        <p:txBody>
+          <a:bodyPr wrap="square" anchor="t" lIns="0" rIns="0" tIns="0" bIns="0">
+            <a:noAutofit/>
+          </a:bodyPr>
+          <a:lstStyle/>
+          <a:p>
+            <a:pPr algn="l"/>
+            <a:r>
+              <a:rPr sz="1700" b="1" i="0">
+                <a:solidFill>
+                  <a:srgbClr val="FFFFFF"/>
+                </a:solidFill>
+                <a:latin typeface="Calibri"/>
+                <a:ea typeface="Microsoft YaHei"/>
+                <a:cs typeface="Microsoft YaHei"/>
+              </a:rPr>
+              <a:t>结果</a:t>
+            </a:r>
+          </a:p>
+        </p:txBody>
+      </p:sp>
+      <p:sp>
+        <p:nvSpPr>
+          <p:cNvPr id="9" name="TextBox 8"/>
+          <p:cNvSpPr txBox="1"/>
+          <p:nvPr/>
+        </p:nvSpPr>
+        <p:spPr>
+          <a:xfrm>
+            <a:off x="813816" y="3427728"/>
+            <a:ext cx="3906851" cy="315468"/>
+          </a:xfrm>
+          <a:prstGeom prst="rect">
+            <a:avLst/>
+          </a:prstGeom>
+          <a:noFill/>
+        </p:spPr>
+        <p:txBody>
+          <a:bodyPr wrap="square" anchor="t" lIns="0" rIns="0" tIns="0" bIns="0">
+            <a:noAutofit/>
+          </a:bodyPr>
+          <a:lstStyle/>
+          <a:p>
+            <a:pPr algn="l">
+              <a:lnSpc>
+                <a:spcPct val="115000"/>
+              </a:lnSpc>
+            </a:pPr>
+            <a:r>
+              <a:rPr sz="1800" b="0" i="0">
+                <a:solidFill>
+                  <a:srgbClr val="000000"/>
+                </a:solidFill>
+                <a:latin typeface="Calibri"/>
+                <a:ea typeface="Microsoft YaHei"/>
+                <a:cs typeface="Microsoft YaHei"/>
+              </a:rPr>
+              <a:t>X.com 原始页面</a:t>
+            </a:r>
+          </a:p>
+        </p:txBody>
+      </p:sp>
+      <p:sp>
+        <p:nvSpPr>
+          <p:cNvPr id="10" name="TextBox 9"/>
+          <p:cNvSpPr txBox="1"/>
+          <p:nvPr/>
+        </p:nvSpPr>
+        <p:spPr>
+          <a:xfrm>
+            <a:off x="4940123" y="3427728"/>
+            <a:ext cx="6474331" cy="315468"/>
+          </a:xfrm>
+          <a:prstGeom prst="rect">
+            <a:avLst/>
+          </a:prstGeom>
+          <a:noFill/>
+        </p:spPr>
+        <p:txBody>
+          <a:bodyPr wrap="square" anchor="t" lIns="0" rIns="0" tIns="0" bIns="0">
+            <a:noAutofit/>
+          </a:bodyPr>
+          <a:lstStyle/>
+          <a:p>
+            <a:pPr algn="l">
+              <a:lnSpc>
+                <a:spcPct val="115000"/>
+              </a:lnSpc>
+            </a:pPr>
+            <a:r>
+              <a:rPr sz="1800" b="0" i="0">
+                <a:solidFill>
+                  <a:srgbClr val="000000"/>
+                </a:solidFill>
+                <a:latin typeface="Calibri"/>
+                <a:ea typeface="Microsoft YaHei"/>
+                <a:cs typeface="Microsoft YaHei"/>
+              </a:rPr>
+              <a:t>丰富的动态 Broadcast 卡片——可见</a:t>
+            </a:r>
+          </a:p>
+        </p:txBody>
+      </p:sp>
+      <p:sp>
+        <p:nvSpPr>
+          <p:cNvPr id="11" name="Rectangle 10"/>
+          <p:cNvSpPr/>
+          <p:nvPr/>
+        </p:nvSpPr>
+        <p:spPr>
+          <a:xfrm>
+            <a:off x="685800" y="3779772"/>
+            <a:ext cx="10820095" cy="9525"/>
+          </a:xfrm>
+          <a:prstGeom prst="rect">
+            <a:avLst/>
+          </a:prstGeom>
+          <a:solidFill>
+            <a:srgbClr val="D8DEE4"/>
+          </a:solidFill>
+          <a:ln>
+            <a:noFill/>
+          </a:ln>
+          <a:effectLst/>
+        </p:spPr>
+        <p:style>
+          <a:lnRef idx="1">
+            <a:schemeClr val="accent1"/>
+          </a:lnRef>
+          <a:fillRef idx="3">
+            <a:schemeClr val="accent1"/>
+          </a:fillRef>
+          <a:effectRef idx="2">
+            <a:schemeClr val="accent1"/>
+          </a:effectRef>
+          <a:fontRef idx="minor">
+            <a:schemeClr val="lt1"/>
+          </a:fontRef>
+        </p:style>
+        <p:txBody>
+          <a:bodyPr rtlCol="0" anchor="ctr"/>
+          <a:lstStyle/>
+          <a:p>
+            <a:pPr algn="ctr"/>
+          </a:p>
+        </p:txBody>
+      </p:sp>
+      <p:sp>
+        <p:nvSpPr>
+          <p:cNvPr id="12" name="Rectangle 11"/>
+          <p:cNvSpPr/>
+          <p:nvPr/>
+        </p:nvSpPr>
+        <p:spPr>
+          <a:xfrm>
+            <a:off x="685800" y="3779772"/>
+            <a:ext cx="10820095" cy="704088"/>
+          </a:xfrm>
+          <a:prstGeom prst="rect">
+            <a:avLst/>
+          </a:prstGeom>
+          <a:solidFill>
+            <a:srgbClr val="F2F2F2"/>
+          </a:solidFill>
+          <a:ln>
+            <a:noFill/>
+          </a:ln>
+          <a:effectLst/>
+        </p:spPr>
+        <p:style>
+          <a:lnRef idx="1">
+            <a:schemeClr val="accent1"/>
+          </a:lnRef>
+          <a:fillRef idx="3">
+            <a:schemeClr val="accent1"/>
+          </a:fillRef>
+          <a:effectRef idx="2">
+            <a:schemeClr val="accent1"/>
+          </a:effectRef>
+          <a:fontRef idx="minor">
+            <a:schemeClr val="lt1"/>
+          </a:fontRef>
+        </p:style>
+        <p:txBody>
+          <a:bodyPr rtlCol="0" anchor="ctr"/>
+          <a:lstStyle/>
+          <a:p>
+            <a:pPr algn="ctr"/>
+          </a:p>
+        </p:txBody>
+      </p:sp>
+      <p:sp>
+        <p:nvSpPr>
+          <p:cNvPr id="13" name="TextBox 12"/>
+          <p:cNvSpPr txBox="1"/>
+          <p:nvPr/>
+        </p:nvSpPr>
+        <p:spPr>
+          <a:xfrm>
+            <a:off x="813816" y="3852924"/>
+            <a:ext cx="3906851" cy="594360"/>
+          </a:xfrm>
+          <a:prstGeom prst="rect">
+            <a:avLst/>
+          </a:prstGeom>
+          <a:noFill/>
+        </p:spPr>
+        <p:txBody>
+          <a:bodyPr wrap="square" anchor="t" lIns="0" rIns="0" tIns="0" bIns="0">
+            <a:noAutofit/>
+          </a:bodyPr>
+          <a:lstStyle/>
+          <a:p>
+            <a:pPr algn="l">
+              <a:lnSpc>
+                <a:spcPct val="115000"/>
+              </a:lnSpc>
+            </a:pPr>
+            <a:r>
+              <a:rPr sz="1800" b="0" i="0">
+                <a:solidFill>
+                  <a:srgbClr val="000000"/>
+                </a:solidFill>
+                <a:latin typeface="Calibri"/>
+                <a:ea typeface="Microsoft YaHei"/>
+                <a:cs typeface="Microsoft YaHei"/>
+              </a:rPr>
+              <a:t>免费 syndication 数据</a:t>
+            </a:r>
+          </a:p>
+        </p:txBody>
+      </p:sp>
+      <p:sp>
+        <p:nvSpPr>
+          <p:cNvPr id="14" name="TextBox 13"/>
+          <p:cNvSpPr txBox="1"/>
+          <p:nvPr/>
+        </p:nvSpPr>
+        <p:spPr>
+          <a:xfrm>
+            <a:off x="4940123" y="3852924"/>
+            <a:ext cx="6474331" cy="594360"/>
+          </a:xfrm>
+          <a:prstGeom prst="rect">
+            <a:avLst/>
+          </a:prstGeom>
+          <a:noFill/>
+        </p:spPr>
+        <p:txBody>
+          <a:bodyPr wrap="square" anchor="t" lIns="0" rIns="0" tIns="0" bIns="0">
+            <a:noAutofit/>
+          </a:bodyPr>
+          <a:lstStyle/>
+          <a:p>
+            <a:pPr algn="l">
+              <a:lnSpc>
+                <a:spcPct val="115000"/>
+              </a:lnSpc>
+            </a:pPr>
+            <a:r>
+              <a:rPr sz="1800" b="0" i="0">
+                <a:solidFill>
+                  <a:srgbClr val="000000"/>
+                </a:solidFill>
+                <a:latin typeface="Calibri"/>
+                <a:ea typeface="Microsoft YaHei"/>
+                <a:cs typeface="Microsoft YaHei"/>
+              </a:rPr>
+              <a:t>仅有 URL 实体——没有卡片、封面图或标题</a:t>
+            </a:r>
+          </a:p>
+        </p:txBody>
+      </p:sp>
+      <p:sp>
+        <p:nvSpPr>
+          <p:cNvPr id="15" name="Rectangle 14"/>
+          <p:cNvSpPr/>
+          <p:nvPr/>
+        </p:nvSpPr>
+        <p:spPr>
+          <a:xfrm>
+            <a:off x="685800" y="4483860"/>
+            <a:ext cx="10820095" cy="9525"/>
+          </a:xfrm>
+          <a:prstGeom prst="rect">
+            <a:avLst/>
+          </a:prstGeom>
+          <a:solidFill>
+            <a:srgbClr val="D8DEE4"/>
+          </a:solidFill>
+          <a:ln>
+            <a:noFill/>
+          </a:ln>
+          <a:effectLst/>
+        </p:spPr>
+        <p:style>
+          <a:lnRef idx="1">
+            <a:schemeClr val="accent1"/>
+          </a:lnRef>
+          <a:fillRef idx="3">
+            <a:schemeClr val="accent1"/>
+          </a:fillRef>
+          <a:effectRef idx="2">
+            <a:schemeClr val="accent1"/>
+          </a:effectRef>
+          <a:fontRef idx="minor">
+            <a:schemeClr val="lt1"/>
+          </a:fontRef>
+        </p:style>
+        <p:txBody>
+          <a:bodyPr rtlCol="0" anchor="ctr"/>
+          <a:lstStyle/>
+          <a:p>
+            <a:pPr algn="ctr"/>
+          </a:p>
+        </p:txBody>
+      </p:sp>
+      <p:sp>
+        <p:nvSpPr>
+          <p:cNvPr id="16" name="TextBox 15"/>
+          <p:cNvSpPr txBox="1"/>
+          <p:nvPr/>
+        </p:nvSpPr>
+        <p:spPr>
+          <a:xfrm>
+            <a:off x="813816" y="4557012"/>
+            <a:ext cx="3906851" cy="315468"/>
+          </a:xfrm>
+          <a:prstGeom prst="rect">
+            <a:avLst/>
+          </a:prstGeom>
+          <a:noFill/>
+        </p:spPr>
+        <p:txBody>
+          <a:bodyPr wrap="square" anchor="t" lIns="0" rIns="0" tIns="0" bIns="0">
+            <a:noAutofit/>
+          </a:bodyPr>
+          <a:lstStyle/>
+          <a:p>
+            <a:pPr algn="l">
+              <a:lnSpc>
+                <a:spcPct val="115000"/>
+              </a:lnSpc>
+            </a:pPr>
+            <a:r>
+              <a:rPr sz="1800" b="0" i="0">
+                <a:solidFill>
+                  <a:srgbClr val="000000"/>
+                </a:solidFill>
+                <a:latin typeface="Calibri"/>
+                <a:ea typeface="Microsoft YaHei"/>
+                <a:cs typeface="Microsoft YaHei"/>
+              </a:rPr>
+              <a:t>react-tweet 库</a:t>
+            </a:r>
+          </a:p>
+        </p:txBody>
+      </p:sp>
+      <p:sp>
+        <p:nvSpPr>
+          <p:cNvPr id="17" name="TextBox 16"/>
+          <p:cNvSpPr txBox="1"/>
+          <p:nvPr/>
+        </p:nvSpPr>
+        <p:spPr>
+          <a:xfrm>
+            <a:off x="4940123" y="4557012"/>
+            <a:ext cx="6474331" cy="315468"/>
+          </a:xfrm>
+          <a:prstGeom prst="rect">
+            <a:avLst/>
+          </a:prstGeom>
+          <a:noFill/>
+        </p:spPr>
+        <p:txBody>
+          <a:bodyPr wrap="square" anchor="t" lIns="0" rIns="0" tIns="0" bIns="0">
+            <a:noAutofit/>
+          </a:bodyPr>
+          <a:lstStyle/>
+          <a:p>
+            <a:pPr algn="l">
+              <a:lnSpc>
+                <a:spcPct val="115000"/>
+              </a:lnSpc>
+            </a:pPr>
+            <a:r>
+              <a:rPr sz="1800" b="0" i="0">
+                <a:solidFill>
+                  <a:srgbClr val="000000"/>
+                </a:solidFill>
+                <a:latin typeface="Calibri"/>
+                <a:ea typeface="Microsoft YaHei"/>
+                <a:cs typeface="Microsoft YaHei"/>
+              </a:rPr>
+              <a:t>源码任何地方都没有卡片/broadcast 概念</a:t>
+            </a:r>
+          </a:p>
+        </p:txBody>
+      </p:sp>
+      <p:sp>
+        <p:nvSpPr>
+          <p:cNvPr id="18" name="Rectangle 17"/>
+          <p:cNvSpPr/>
+          <p:nvPr/>
+        </p:nvSpPr>
+        <p:spPr>
+          <a:xfrm>
+            <a:off x="685800" y="4909056"/>
+            <a:ext cx="10820095" cy="9525"/>
+          </a:xfrm>
+          <a:prstGeom prst="rect">
+            <a:avLst/>
+          </a:prstGeom>
+          <a:solidFill>
+            <a:srgbClr val="D8DEE4"/>
+          </a:solidFill>
+          <a:ln>
+            <a:noFill/>
+          </a:ln>
+          <a:effectLst/>
+        </p:spPr>
+        <p:style>
+          <a:lnRef idx="1">
+            <a:schemeClr val="accent1"/>
+          </a:lnRef>
+          <a:fillRef idx="3">
+            <a:schemeClr val="accent1"/>
+          </a:fillRef>
+          <a:effectRef idx="2">
+            <a:schemeClr val="accent1"/>
+          </a:effectRef>
+          <a:fontRef idx="minor">
+            <a:schemeClr val="lt1"/>
+          </a:fontRef>
+        </p:style>
+        <p:txBody>
+          <a:bodyPr rtlCol="0" anchor="ctr"/>
+          <a:lstStyle/>
+          <a:p>
+            <a:pPr algn="ctr"/>
+          </a:p>
+        </p:txBody>
+      </p:sp>
+      <p:sp>
+        <p:nvSpPr>
+          <p:cNvPr id="19" name="Rectangle 18"/>
+          <p:cNvSpPr/>
+          <p:nvPr/>
+        </p:nvSpPr>
+        <p:spPr>
+          <a:xfrm>
+            <a:off x="685800" y="4909056"/>
+            <a:ext cx="10820095" cy="425196"/>
+          </a:xfrm>
+          <a:prstGeom prst="rect">
+            <a:avLst/>
+          </a:prstGeom>
+          <a:solidFill>
+            <a:srgbClr val="F2F2F2"/>
+          </a:solidFill>
+          <a:ln>
+            <a:noFill/>
+          </a:ln>
+          <a:effectLst/>
+        </p:spPr>
+        <p:style>
+          <a:lnRef idx="1">
+            <a:schemeClr val="accent1"/>
+          </a:lnRef>
+          <a:fillRef idx="3">
+            <a:schemeClr val="accent1"/>
+          </a:fillRef>
+          <a:effectRef idx="2">
+            <a:schemeClr val="accent1"/>
+          </a:effectRef>
+          <a:fontRef idx="minor">
+            <a:schemeClr val="lt1"/>
+          </a:fontRef>
+        </p:style>
+        <p:txBody>
+          <a:bodyPr rtlCol="0" anchor="ctr"/>
+          <a:lstStyle/>
+          <a:p>
+            <a:pPr algn="ctr"/>
+          </a:p>
+        </p:txBody>
+      </p:sp>
+      <p:sp>
+        <p:nvSpPr>
+          <p:cNvPr id="20" name="TextBox 19"/>
+          <p:cNvSpPr txBox="1"/>
+          <p:nvPr/>
+        </p:nvSpPr>
+        <p:spPr>
+          <a:xfrm>
+            <a:off x="813816" y="4982208"/>
+            <a:ext cx="3906851" cy="315468"/>
+          </a:xfrm>
+          <a:prstGeom prst="rect">
+            <a:avLst/>
+          </a:prstGeom>
+          <a:noFill/>
+        </p:spPr>
+        <p:txBody>
+          <a:bodyPr wrap="square" anchor="t" lIns="0" rIns="0" tIns="0" bIns="0">
+            <a:noAutofit/>
+          </a:bodyPr>
+          <a:lstStyle/>
+          <a:p>
+            <a:pPr algn="l">
+              <a:lnSpc>
+                <a:spcPct val="115000"/>
+              </a:lnSpc>
+            </a:pPr>
+            <a:r>
+              <a:rPr sz="1800" b="0" i="0">
+                <a:solidFill>
+                  <a:srgbClr val="000000"/>
+                </a:solidFill>
+                <a:latin typeface="Calibri"/>
+                <a:ea typeface="Microsoft YaHei"/>
+                <a:cs typeface="Microsoft YaHei"/>
+              </a:rPr>
+              <a:t>本应用 + 导出</a:t>
+            </a:r>
+          </a:p>
+        </p:txBody>
+      </p:sp>
+      <p:sp>
+        <p:nvSpPr>
+          <p:cNvPr id="21" name="TextBox 20"/>
+          <p:cNvSpPr txBox="1"/>
+          <p:nvPr/>
+        </p:nvSpPr>
+        <p:spPr>
+          <a:xfrm>
+            <a:off x="4940123" y="4982208"/>
+            <a:ext cx="6474331" cy="315468"/>
+          </a:xfrm>
+          <a:prstGeom prst="rect">
+            <a:avLst/>
+          </a:prstGeom>
+          <a:noFill/>
+        </p:spPr>
+        <p:txBody>
+          <a:bodyPr wrap="square" anchor="t" lIns="0" rIns="0" tIns="0" bIns="0">
+            <a:noAutofit/>
+          </a:bodyPr>
+          <a:lstStyle/>
+          <a:p>
+            <a:pPr algn="l">
+              <a:lnSpc>
+                <a:spcPct val="115000"/>
+              </a:lnSpc>
+            </a:pPr>
+            <a:r>
+              <a:rPr sz="1800" b="0" i="0">
+                <a:solidFill>
+                  <a:srgbClr val="000000"/>
+                </a:solidFill>
+                <a:latin typeface="Calibri"/>
+                <a:ea typeface="Microsoft YaHei"/>
+                <a:cs typeface="Microsoft YaHei"/>
+              </a:rPr>
+              <a:t>文本+链接——与上游数据完全一致</a:t>
+            </a:r>
+          </a:p>
+        </p:txBody>
+      </p:sp>
+      <p:sp>
+        <p:nvSpPr>
+          <p:cNvPr id="22" name="Rectangle 21"/>
+          <p:cNvSpPr/>
+          <p:nvPr/>
+        </p:nvSpPr>
+        <p:spPr>
+          <a:xfrm>
+            <a:off x="685800" y="5334252"/>
+            <a:ext cx="10820095" cy="9525"/>
+          </a:xfrm>
+          <a:prstGeom prst="rect">
+            <a:avLst/>
+          </a:prstGeom>
+          <a:solidFill>
+            <a:srgbClr val="D8DEE4"/>
+          </a:solidFill>
+          <a:ln>
+            <a:noFill/>
+          </a:ln>
+          <a:effectLst/>
+        </p:spPr>
+        <p:style>
+          <a:lnRef idx="1">
+            <a:schemeClr val="accent1"/>
+          </a:lnRef>
+          <a:fillRef idx="3">
+            <a:schemeClr val="accent1"/>
+          </a:fillRef>
+          <a:effectRef idx="2">
+            <a:schemeClr val="accent1"/>
+          </a:effectRef>
+          <a:fontRef idx="minor">
+            <a:schemeClr val="lt1"/>
+          </a:fontRef>
+        </p:style>
+        <p:txBody>
+          <a:bodyPr rtlCol="0" anchor="ctr"/>
+          <a:lstStyle/>
+          <a:p>
+            <a:pPr algn="ctr"/>
+          </a:p>
+        </p:txBody>
+      </p:sp>
+      <p:sp>
+        <p:nvSpPr>
+          <p:cNvPr id="23" name="TextBox 22"/>
+          <p:cNvSpPr txBox="1"/>
+          <p:nvPr/>
+        </p:nvSpPr>
+        <p:spPr>
+          <a:xfrm>
+            <a:off x="685800" y="6355080"/>
+            <a:ext cx="9601200" cy="274320"/>
+          </a:xfrm>
+          <a:prstGeom prst="rect">
+            <a:avLst/>
+          </a:prstGeom>
+          <a:noFill/>
+        </p:spPr>
+        <p:txBody>
+          <a:bodyPr wrap="square" anchor="t" lIns="0" rIns="0" tIns="0" bIns="0">
+            <a:noAutofit/>
+          </a:bodyPr>
+          <a:lstStyle/>
+          <a:p>
+            <a:pPr algn="l"/>
+            <a:r>
+              <a:rPr sz="1200" b="0" i="1">
+                <a:solidFill>
+                  <a:srgbClr val="808080"/>
+                </a:solidFill>
+                <a:latin typeface="Calibri"/>
+                <a:ea typeface="Microsoft YaHei"/>
+                <a:cs typeface="Microsoft YaHei"/>
+              </a:rPr>
+              <a:t>TODOS.md；docs/DESIGN_REVIEW_4_1_RELEASE.md ——归类为已知上游限制，非 bug</a:t>
+            </a:r>
+          </a:p>
+        </p:txBody>
+      </p:sp>
+      <p:sp>
+        <p:nvSpPr>
+          <p:cNvPr id="24" name="TextBox 23"/>
+          <p:cNvSpPr txBox="1"/>
+          <p:nvPr/>
+        </p:nvSpPr>
+        <p:spPr>
+          <a:xfrm>
+            <a:off x="10591495" y="6355080"/>
+            <a:ext cx="914400" cy="274320"/>
+          </a:xfrm>
+          <a:prstGeom prst="rect">
+            <a:avLst/>
+          </a:prstGeom>
+          <a:noFill/>
+        </p:spPr>
+        <p:txBody>
+          <a:bodyPr wrap="square" anchor="t" lIns="0" rIns="0" tIns="0" bIns="0">
+            <a:noAutofit/>
+          </a:bodyPr>
+          <a:lstStyle/>
+          <a:p>
+            <a:pPr algn="l"/>
+            <a:r>
+              <a:rPr sz="1200" b="0" i="0">
+                <a:solidFill>
+                  <a:srgbClr val="808080"/>
+                </a:solidFill>
+                <a:latin typeface="Calibri"/>
+                <a:ea typeface="Microsoft YaHei"/>
+                <a:cs typeface="Microsoft YaHei"/>
+              </a:rPr>
+              <a:t>21</a:t>
+            </a:r>
+          </a:p>
+        </p:txBody>
+      </p:sp>
+    </p:spTree>
+  </p:cSld>
+  <p:clrMapOvr>
+    <a:masterClrMapping/>
+  </p:clrMapOvr>
+</p:sld>
+</file>
+
+<file path=ppt/slides/slide23.xml><?xml version="1.0" encoding="utf-8"?>
+<p:sld xmlns:a="http://schemas.openxmlformats.org/drawingml/2006/main" xmlns:p="http://schemas.openxmlformats.org/presentationml/2006/main" xmlns:r="http://schemas.openxmlformats.org/officeDocument/2006/relationships">
+  <p:cSld>
+    <p:spTree>
+      <p:nvGrpSpPr>
+        <p:cNvPr id="1" name=""/>
+        <p:cNvGrpSpPr/>
+        <p:nvPr/>
+      </p:nvGrpSpPr>
+      <p:grpSpPr/>
+      <p:sp>
+        <p:nvSpPr>
+          <p:cNvPr id="2" name="Rectangle 1"/>
+          <p:cNvSpPr/>
+          <p:nvPr/>
+        </p:nvSpPr>
+        <p:spPr>
+          <a:xfrm>
+            <a:off x="0" y="0"/>
+            <a:ext cx="12191695" cy="6858000"/>
+          </a:xfrm>
+          <a:prstGeom prst="rect">
+            <a:avLst/>
+          </a:prstGeom>
+          <a:solidFill>
+            <a:srgbClr val="143552"/>
+          </a:solidFill>
+          <a:ln>
+            <a:noFill/>
+          </a:ln>
+          <a:effectLst/>
+        </p:spPr>
+        <p:style>
+          <a:lnRef idx="1">
+            <a:schemeClr val="accent1"/>
+          </a:lnRef>
+          <a:fillRef idx="3">
+            <a:schemeClr val="accent1"/>
+          </a:fillRef>
+          <a:effectRef idx="2">
+            <a:schemeClr val="accent1"/>
+          </a:effectRef>
+          <a:fontRef idx="minor">
+            <a:schemeClr val="lt1"/>
+          </a:fontRef>
+        </p:style>
+        <p:txBody>
+          <a:bodyPr rtlCol="0" anchor="ctr"/>
+          <a:lstStyle/>
+          <a:p>
+            <a:pPr algn="ctr"/>
+          </a:p>
+        </p:txBody>
+      </p:sp>
+      <p:sp>
+        <p:nvSpPr>
+          <p:cNvPr id="3" name="Rectangle 2"/>
+          <p:cNvSpPr/>
+          <p:nvPr/>
+        </p:nvSpPr>
+        <p:spPr>
+          <a:xfrm>
+            <a:off x="685800" y="2103120"/>
+            <a:ext cx="54864" cy="2377440"/>
+          </a:xfrm>
+          <a:prstGeom prst="rect">
+            <a:avLst/>
+          </a:prstGeom>
+          <a:solidFill>
+            <a:srgbClr val="00A6C9"/>
+          </a:solidFill>
+          <a:ln>
+            <a:noFill/>
+          </a:ln>
+          <a:effectLst/>
+        </p:spPr>
+        <p:style>
+          <a:lnRef idx="1">
+            <a:schemeClr val="accent1"/>
+          </a:lnRef>
+          <a:fillRef idx="3">
+            <a:schemeClr val="accent1"/>
+          </a:fillRef>
+          <a:effectRef idx="2">
+            <a:schemeClr val="accent1"/>
+          </a:effectRef>
+          <a:fontRef idx="minor">
+            <a:schemeClr val="lt1"/>
+          </a:fontRef>
+        </p:style>
+        <p:txBody>
+          <a:bodyPr rtlCol="0" anchor="ctr"/>
+          <a:lstStyle/>
+          <a:p>
+            <a:pPr algn="ctr"/>
+          </a:p>
+        </p:txBody>
+      </p:sp>
+      <p:sp>
+        <p:nvSpPr>
+          <p:cNvPr id="4" name="TextBox 3"/>
+          <p:cNvSpPr txBox="1"/>
+          <p:nvPr/>
+        </p:nvSpPr>
+        <p:spPr>
+          <a:xfrm>
+            <a:off x="1143000" y="1691640"/>
+            <a:ext cx="9601200" cy="320040"/>
+          </a:xfrm>
+          <a:prstGeom prst="rect">
+            <a:avLst/>
+          </a:prstGeom>
+          <a:noFill/>
+        </p:spPr>
+        <p:txBody>
+          <a:bodyPr wrap="square" anchor="t" lIns="0" rIns="0" tIns="0" bIns="0">
+            <a:noAutofit/>
+          </a:bodyPr>
+          <a:lstStyle/>
+          <a:p>
+            <a:pPr algn="l"/>
+            <a:r>
+              <a:rPr sz="1600" b="1" i="0">
+                <a:solidFill>
+                  <a:srgbClr val="7FC4E8"/>
+                </a:solidFill>
+                <a:latin typeface="Calibri"/>
+                <a:ea typeface="Microsoft YaHei"/>
+                <a:cs typeface="Microsoft YaHei"/>
+              </a:rPr>
+              <a:t>教程 4.1 —— 被快速杀死的错误假设</a:t>
+            </a:r>
+          </a:p>
+        </p:txBody>
+      </p:sp>
+      <p:sp>
+        <p:nvSpPr>
+          <p:cNvPr id="5" name="TextBox 4"/>
+          <p:cNvSpPr txBox="1"/>
+          <p:nvPr/>
+        </p:nvSpPr>
+        <p:spPr>
+          <a:xfrm>
+            <a:off x="1143000" y="2148840"/>
+            <a:ext cx="9692640" cy="2844799"/>
+          </a:xfrm>
+          <a:prstGeom prst="rect">
+            <a:avLst/>
+          </a:prstGeom>
+          <a:noFill/>
+        </p:spPr>
+        <p:txBody>
+          <a:bodyPr wrap="square" anchor="t" lIns="0" rIns="0" tIns="0" bIns="0">
+            <a:noAutofit/>
+          </a:bodyPr>
+          <a:lstStyle/>
+          <a:p>
+            <a:pPr algn="l">
+              <a:lnSpc>
+                <a:spcPct val="130000"/>
+              </a:lnSpc>
+            </a:pPr>
+            <a:r>
+              <a:rPr sz="3200" b="1" i="0">
+                <a:solidFill>
+                  <a:srgbClr val="FFFFFF"/>
+                </a:solidFill>
+                <a:latin typeface="Calibri"/>
+                <a:ea typeface="Microsoft YaHei"/>
+                <a:cs typeface="Microsoft YaHei"/>
+              </a:rPr>
+              <a:t>1x、2x、3x 全部在相同的约 8.2 秒时刻失败。
+一个真实的体积问题，会在 1x 时更晚失败、3x 时更早失败。
+完全相同的耗时不是弱证据——它直接证伪了这个假设。</a:t>
+            </a:r>
+          </a:p>
+        </p:txBody>
+      </p:sp>
+      <p:sp>
+        <p:nvSpPr>
+          <p:cNvPr id="6" name="TextBox 5"/>
+          <p:cNvSpPr txBox="1"/>
+          <p:nvPr/>
+        </p:nvSpPr>
+        <p:spPr>
+          <a:xfrm>
+            <a:off x="1143000" y="4663440"/>
+            <a:ext cx="9692640" cy="457200"/>
+          </a:xfrm>
+          <a:prstGeom prst="rect">
+            <a:avLst/>
+          </a:prstGeom>
+          <a:noFill/>
+        </p:spPr>
+        <p:txBody>
+          <a:bodyPr wrap="square" anchor="t" lIns="0" rIns="0" tIns="0" bIns="0">
+            <a:noAutofit/>
+          </a:bodyPr>
+          <a:lstStyle/>
+          <a:p>
+            <a:pPr algn="l"/>
+            <a:r>
+              <a:rPr sz="1600" b="0" i="0">
+                <a:solidFill>
+                  <a:srgbClr val="9AA8B4"/>
+                </a:solidFill>
+                <a:latin typeface="Calibri"/>
+                <a:ea typeface="Microsoft YaHei"/>
+                <a:cs typeface="Microsoft YaHei"/>
+              </a:rPr>
+              <a:t>真正的原因：modern-screenshot 在等待一个从未播放过的视频永远不会触发的 `seeked` 事件。修复：在库看到它之前，先在一份屏幕外的克隆上把 &lt;video&gt; 换成它的封面图。src/lib/export-image.ts</a:t>
+            </a:r>
+          </a:p>
+        </p:txBody>
+      </p:sp>
+      <p:sp>
+        <p:nvSpPr>
+          <p:cNvPr id="7" name="TextBox 6"/>
+          <p:cNvSpPr txBox="1"/>
+          <p:nvPr/>
+        </p:nvSpPr>
+        <p:spPr>
+          <a:xfrm>
+            <a:off x="10591495" y="6355080"/>
+            <a:ext cx="914400" cy="274320"/>
+          </a:xfrm>
+          <a:prstGeom prst="rect">
+            <a:avLst/>
+          </a:prstGeom>
+          <a:noFill/>
+        </p:spPr>
+        <p:txBody>
+          <a:bodyPr wrap="square" anchor="t" lIns="0" rIns="0" tIns="0" bIns="0">
+            <a:noAutofit/>
+          </a:bodyPr>
+          <a:lstStyle/>
+          <a:p>
+            <a:pPr algn="l"/>
+            <a:r>
+              <a:rPr sz="1200" b="0" i="0">
+                <a:solidFill>
+                  <a:srgbClr val="9AA8B4"/>
+                </a:solidFill>
+                <a:latin typeface="Calibri"/>
+                <a:ea typeface="Microsoft YaHei"/>
+                <a:cs typeface="Microsoft YaHei"/>
+              </a:rPr>
+              <a:t>22</a:t>
+            </a:r>
+          </a:p>
+        </p:txBody>
+      </p:sp>
+    </p:spTree>
+  </p:cSld>
+  <p:clrMapOvr>
+    <a:masterClrMapping/>
+  </p:clrMapOvr>
+</p:sld>
+</file>
+
+<file path=ppt/slides/slide24.xml><?xml version="1.0" encoding="utf-8"?>
+<p:sld xmlns:a="http://schemas.openxmlformats.org/drawingml/2006/main" xmlns:p="http://schemas.openxmlformats.org/presentationml/2006/main" xmlns:r="http://schemas.openxmlformats.org/officeDocument/2006/relationships">
+  <p:cSld>
+    <p:spTree>
+      <p:nvGrpSpPr>
+        <p:cNvPr id="1" name=""/>
+        <p:cNvGrpSpPr/>
+        <p:nvPr/>
+      </p:nvGrpSpPr>
+      <p:grpSpPr/>
+      <p:sp>
+        <p:nvSpPr>
+          <p:cNvPr id="2" name="TextBox 1"/>
+          <p:cNvSpPr txBox="1"/>
+          <p:nvPr/>
+        </p:nvSpPr>
+        <p:spPr>
+          <a:xfrm>
+            <a:off x="685800" y="457200"/>
+            <a:ext cx="10820095" cy="274320"/>
+          </a:xfrm>
+          <a:prstGeom prst="rect">
+            <a:avLst/>
+          </a:prstGeom>
+          <a:noFill/>
+        </p:spPr>
+        <p:txBody>
+          <a:bodyPr wrap="square" anchor="t" lIns="0" rIns="0" tIns="0" bIns="0">
+            <a:noAutofit/>
+          </a:bodyPr>
+          <a:lstStyle/>
+          <a:p>
+            <a:pPr algn="l"/>
+            <a:r>
+              <a:rPr sz="1600" b="1" i="0">
+                <a:solidFill>
+                  <a:srgbClr val="1F4E78"/>
+                </a:solidFill>
+                <a:latin typeface="Calibri"/>
+                <a:ea typeface="Microsoft YaHei"/>
+                <a:cs typeface="Microsoft YaHei"/>
+              </a:rPr>
+              <a:t>教程 4.1 —— 延伸后的人工证据阶梯</a:t>
+            </a:r>
+          </a:p>
+        </p:txBody>
+      </p:sp>
+      <p:sp>
+        <p:nvSpPr>
+          <p:cNvPr id="3" name="TextBox 2"/>
+          <p:cNvSpPr txBox="1"/>
+          <p:nvPr/>
+        </p:nvSpPr>
+        <p:spPr>
+          <a:xfrm>
+            <a:off x="685800" y="786384"/>
+            <a:ext cx="10820095" cy="1037335"/>
+          </a:xfrm>
+          <a:prstGeom prst="rect">
+            <a:avLst/>
+          </a:prstGeom>
+          <a:noFill/>
+        </p:spPr>
+        <p:txBody>
+          <a:bodyPr wrap="square" anchor="t" lIns="0" rIns="0" tIns="0" bIns="0">
+            <a:noAutofit/>
+          </a:bodyPr>
+          <a:lstStyle/>
+          <a:p>
+            <a:pPr algn="l">
+              <a:lnSpc>
+                <a:spcPct val="108000"/>
+              </a:lnSpc>
+            </a:pPr>
+            <a:r>
+              <a:rPr sz="3200" b="1" i="0">
+                <a:solidFill>
+                  <a:srgbClr val="1F4E78"/>
+                </a:solidFill>
+                <a:latin typeface="Calibri"/>
+                <a:ea typeface="Microsoft YaHei"/>
+                <a:cs typeface="Microsoft YaHei"/>
+              </a:rPr>
+              <a:t>“承诺 resolve 了”和“一个人粘贴之后亲眼看过”是两个不同的结论</a:t>
+            </a:r>
+          </a:p>
+        </p:txBody>
+      </p:sp>
+      <p:sp>
+        <p:nvSpPr>
+          <p:cNvPr id="4" name="Rectangle 3"/>
+          <p:cNvSpPr/>
+          <p:nvPr/>
+        </p:nvSpPr>
+        <p:spPr>
+          <a:xfrm>
+            <a:off x="685800" y="1933447"/>
+            <a:ext cx="10820095" cy="9525"/>
+          </a:xfrm>
+          <a:prstGeom prst="rect">
+            <a:avLst/>
+          </a:prstGeom>
+          <a:solidFill>
+            <a:srgbClr val="1F4E78"/>
+          </a:solidFill>
+          <a:ln>
+            <a:noFill/>
+          </a:ln>
+          <a:effectLst/>
+        </p:spPr>
+        <p:style>
+          <a:lnRef idx="1">
+            <a:schemeClr val="accent1"/>
+          </a:lnRef>
+          <a:fillRef idx="3">
+            <a:schemeClr val="accent1"/>
+          </a:fillRef>
+          <a:effectRef idx="2">
+            <a:schemeClr val="accent1"/>
+          </a:effectRef>
+          <a:fontRef idx="minor">
+            <a:schemeClr val="lt1"/>
+          </a:fontRef>
+        </p:style>
+        <p:txBody>
+          <a:bodyPr rtlCol="0" anchor="ctr"/>
+          <a:lstStyle/>
+          <a:p>
+            <a:pPr algn="ctr"/>
+          </a:p>
+        </p:txBody>
+      </p:sp>
+      <p:sp>
+        <p:nvSpPr>
+          <p:cNvPr id="5" name="Rectangle 4"/>
+          <p:cNvSpPr/>
+          <p:nvPr/>
+        </p:nvSpPr>
+        <p:spPr>
+          <a:xfrm>
+            <a:off x="704088" y="2205481"/>
+            <a:ext cx="82296" cy="82296"/>
+          </a:xfrm>
+          <a:prstGeom prst="rect">
+            <a:avLst/>
+          </a:prstGeom>
+          <a:solidFill>
+            <a:srgbClr val="1F4E78"/>
+          </a:solidFill>
+          <a:ln>
+            <a:noFill/>
+          </a:ln>
+          <a:effectLst/>
+        </p:spPr>
+        <p:style>
+          <a:lnRef idx="1">
+            <a:schemeClr val="accent1"/>
+          </a:lnRef>
+          <a:fillRef idx="3">
+            <a:schemeClr val="accent1"/>
+          </a:fillRef>
+          <a:effectRef idx="2">
+            <a:schemeClr val="accent1"/>
+          </a:effectRef>
+          <a:fontRef idx="minor">
+            <a:schemeClr val="lt1"/>
+          </a:fontRef>
+        </p:style>
+        <p:txBody>
+          <a:bodyPr rtlCol="0" anchor="ctr"/>
+          <a:lstStyle/>
+          <a:p>
+            <a:pPr algn="ctr"/>
+          </a:p>
+        </p:txBody>
+      </p:sp>
+      <p:sp>
+        <p:nvSpPr>
+          <p:cNvPr id="6" name="TextBox 5"/>
+          <p:cNvSpPr txBox="1"/>
+          <p:nvPr/>
+        </p:nvSpPr>
+        <p:spPr>
+          <a:xfrm>
+            <a:off x="978408" y="2079751"/>
+            <a:ext cx="10527487" cy="1077468"/>
+          </a:xfrm>
+          <a:prstGeom prst="rect">
+            <a:avLst/>
+          </a:prstGeom>
+          <a:noFill/>
+        </p:spPr>
+        <p:txBody>
+          <a:bodyPr wrap="square" anchor="t" lIns="0" rIns="0" tIns="0" bIns="0">
+            <a:noAutofit/>
+          </a:bodyPr>
+          <a:lstStyle/>
+          <a:p>
+            <a:pPr algn="l">
+              <a:lnSpc>
+                <a:spcPct val="122000"/>
+              </a:lnSpc>
+            </a:pPr>
+            <a:r>
+              <a:rPr sz="2200" b="1" i="0">
+                <a:solidFill>
+                  <a:srgbClr val="1F4E78"/>
+                </a:solidFill>
+                <a:latin typeface="Calibri"/>
+                <a:ea typeface="Microsoft YaHei"/>
+                <a:cs typeface="Microsoft YaHei"/>
+              </a:rPr>
+              <a:t>导出之前先打印出来。  </a:t>
+            </a:r>
+            <a:r>
+              <a:rPr sz="2200" b="0" i="0">
+                <a:solidFill>
+                  <a:srgbClr val="000000"/>
+                </a:solidFill>
+                <a:latin typeface="Calibri"/>
+                <a:ea typeface="Microsoft YaHei"/>
+                <a:cs typeface="Microsoft YaHei"/>
+              </a:rPr>
+              <a:t>一份在尝试导出之前就打印出来的 thread 页面 PDF，证明了 DOM 渲染正确——独立于导出接下来做了什么。</a:t>
+            </a:r>
+          </a:p>
+        </p:txBody>
+      </p:sp>
+      <p:sp>
+        <p:nvSpPr>
+          <p:cNvPr id="7" name="Rectangle 6"/>
+          <p:cNvSpPr/>
+          <p:nvPr/>
+        </p:nvSpPr>
+        <p:spPr>
+          <a:xfrm>
+            <a:off x="704088" y="3410965"/>
+            <a:ext cx="82296" cy="82296"/>
+          </a:xfrm>
+          <a:prstGeom prst="rect">
+            <a:avLst/>
+          </a:prstGeom>
+          <a:solidFill>
+            <a:srgbClr val="1F4E78"/>
+          </a:solidFill>
+          <a:ln>
+            <a:noFill/>
+          </a:ln>
+          <a:effectLst/>
+        </p:spPr>
+        <p:style>
+          <a:lnRef idx="1">
+            <a:schemeClr val="accent1"/>
+          </a:lnRef>
+          <a:fillRef idx="3">
+            <a:schemeClr val="accent1"/>
+          </a:fillRef>
+          <a:effectRef idx="2">
+            <a:schemeClr val="accent1"/>
+          </a:effectRef>
+          <a:fontRef idx="minor">
+            <a:schemeClr val="lt1"/>
+          </a:fontRef>
+        </p:style>
+        <p:txBody>
+          <a:bodyPr rtlCol="0" anchor="ctr"/>
+          <a:lstStyle/>
+          <a:p>
+            <a:pPr algn="ctr"/>
+          </a:p>
+        </p:txBody>
+      </p:sp>
+      <p:sp>
+        <p:nvSpPr>
+          <p:cNvPr id="8" name="TextBox 7"/>
+          <p:cNvSpPr txBox="1"/>
+          <p:nvPr/>
+        </p:nvSpPr>
+        <p:spPr>
+          <a:xfrm>
+            <a:off x="978408" y="3285235"/>
+            <a:ext cx="10527487" cy="1077468"/>
+          </a:xfrm>
+          <a:prstGeom prst="rect">
+            <a:avLst/>
+          </a:prstGeom>
+          <a:noFill/>
+        </p:spPr>
+        <p:txBody>
+          <a:bodyPr wrap="square" anchor="t" lIns="0" rIns="0" tIns="0" bIns="0">
+            <a:noAutofit/>
+          </a:bodyPr>
+          <a:lstStyle/>
+          <a:p>
+            <a:pPr algn="l">
+              <a:lnSpc>
+                <a:spcPct val="122000"/>
+              </a:lnSpc>
+            </a:pPr>
+            <a:r>
+              <a:rPr sz="2200" b="1" i="0">
+                <a:solidFill>
+                  <a:srgbClr val="1F4E78"/>
+                </a:solidFill>
+                <a:latin typeface="Calibri"/>
+                <a:ea typeface="Microsoft YaHei"/>
+                <a:cs typeface="Microsoft YaHei"/>
+              </a:rPr>
+              <a:t>不只是本地，是生产环境。  </a:t>
+            </a:r>
+            <a:r>
+              <a:rPr sz="2200" b="0" i="0">
+                <a:solidFill>
+                  <a:srgbClr val="000000"/>
+                </a:solidFill>
+                <a:latin typeface="Calibri"/>
+                <a:ea typeface="Microsoft YaHei"/>
+                <a:cs typeface="Microsoft YaHei"/>
+              </a:rPr>
+              <a:t>修复之后，Download PNG 和 Copy image 都针对线上已部署的 URL 重新跑了一遍，不只是本地环境。</a:t>
+            </a:r>
+          </a:p>
+        </p:txBody>
+      </p:sp>
+      <p:sp>
+        <p:nvSpPr>
+          <p:cNvPr id="9" name="Rectangle 8"/>
+          <p:cNvSpPr/>
+          <p:nvPr/>
+        </p:nvSpPr>
+        <p:spPr>
+          <a:xfrm>
+            <a:off x="704088" y="4616449"/>
+            <a:ext cx="82296" cy="82296"/>
+          </a:xfrm>
+          <a:prstGeom prst="rect">
+            <a:avLst/>
+          </a:prstGeom>
+          <a:solidFill>
+            <a:srgbClr val="1F4E78"/>
+          </a:solidFill>
+          <a:ln>
+            <a:noFill/>
+          </a:ln>
+          <a:effectLst/>
+        </p:spPr>
+        <p:style>
+          <a:lnRef idx="1">
+            <a:schemeClr val="accent1"/>
+          </a:lnRef>
+          <a:fillRef idx="3">
+            <a:schemeClr val="accent1"/>
+          </a:fillRef>
+          <a:effectRef idx="2">
+            <a:schemeClr val="accent1"/>
+          </a:effectRef>
+          <a:fontRef idx="minor">
+            <a:schemeClr val="lt1"/>
+          </a:fontRef>
+        </p:style>
+        <p:txBody>
+          <a:bodyPr rtlCol="0" anchor="ctr"/>
+          <a:lstStyle/>
+          <a:p>
+            <a:pPr algn="ctr"/>
+          </a:p>
+        </p:txBody>
+      </p:sp>
+      <p:sp>
+        <p:nvSpPr>
+          <p:cNvPr id="10" name="TextBox 9"/>
+          <p:cNvSpPr txBox="1"/>
+          <p:nvPr/>
+        </p:nvSpPr>
+        <p:spPr>
+          <a:xfrm>
+            <a:off x="978408" y="4490719"/>
+            <a:ext cx="10527487" cy="1077468"/>
+          </a:xfrm>
+          <a:prstGeom prst="rect">
+            <a:avLst/>
+          </a:prstGeom>
+          <a:noFill/>
+        </p:spPr>
+        <p:txBody>
+          <a:bodyPr wrap="square" anchor="t" lIns="0" rIns="0" tIns="0" bIns="0">
+            <a:noAutofit/>
+          </a:bodyPr>
+          <a:lstStyle/>
+          <a:p>
+            <a:pPr algn="l">
+              <a:lnSpc>
+                <a:spcPct val="122000"/>
+              </a:lnSpc>
+            </a:pPr>
+            <a:r>
+              <a:rPr sz="2200" b="1" i="0">
+                <a:solidFill>
+                  <a:srgbClr val="1F4E78"/>
+                </a:solidFill>
+                <a:latin typeface="Calibri"/>
+                <a:ea typeface="Microsoft YaHei"/>
+                <a:cs typeface="Microsoft YaHei"/>
+              </a:rPr>
+              <a:t>跨应用、亲手确认。  </a:t>
+            </a:r>
+            <a:r>
+              <a:rPr sz="2200" b="0" i="0">
+                <a:solidFill>
+                  <a:srgbClr val="000000"/>
+                </a:solidFill>
+                <a:latin typeface="Calibri"/>
+                <a:ea typeface="Microsoft YaHei"/>
+                <a:cs typeface="Microsoft YaHei"/>
+              </a:rPr>
+              <a:t>复制出来的图片被粘贴进 Windows 11 画图并经过肉眼确认——闭合了一个自最初那份教程以来就一直未经验证的剪贴板声明。</a:t>
+            </a:r>
+          </a:p>
+        </p:txBody>
+      </p:sp>
+      <p:sp>
+        <p:nvSpPr>
+          <p:cNvPr id="11" name="Rectangle 10"/>
+          <p:cNvSpPr/>
+          <p:nvPr/>
+        </p:nvSpPr>
+        <p:spPr>
+          <a:xfrm>
+            <a:off x="704088" y="5821933"/>
+            <a:ext cx="82296" cy="82296"/>
+          </a:xfrm>
+          <a:prstGeom prst="rect">
+            <a:avLst/>
+          </a:prstGeom>
+          <a:solidFill>
+            <a:srgbClr val="1F4E78"/>
+          </a:solidFill>
+          <a:ln>
+            <a:noFill/>
+          </a:ln>
+          <a:effectLst/>
+        </p:spPr>
+        <p:style>
+          <a:lnRef idx="1">
+            <a:schemeClr val="accent1"/>
+          </a:lnRef>
+          <a:fillRef idx="3">
+            <a:schemeClr val="accent1"/>
+          </a:fillRef>
+          <a:effectRef idx="2">
+            <a:schemeClr val="accent1"/>
+          </a:effectRef>
+          <a:fontRef idx="minor">
+            <a:schemeClr val="lt1"/>
+          </a:fontRef>
+        </p:style>
+        <p:txBody>
+          <a:bodyPr rtlCol="0" anchor="ctr"/>
+          <a:lstStyle/>
+          <a:p>
+            <a:pPr algn="ctr"/>
+          </a:p>
+        </p:txBody>
+      </p:sp>
+      <p:sp>
+        <p:nvSpPr>
+          <p:cNvPr id="12" name="TextBox 11"/>
+          <p:cNvSpPr txBox="1"/>
+          <p:nvPr/>
+        </p:nvSpPr>
+        <p:spPr>
+          <a:xfrm>
+            <a:off x="978408" y="5696203"/>
+            <a:ext cx="10527487" cy="1077468"/>
+          </a:xfrm>
+          <a:prstGeom prst="rect">
+            <a:avLst/>
+          </a:prstGeom>
+          <a:noFill/>
+        </p:spPr>
+        <p:txBody>
+          <a:bodyPr wrap="square" anchor="t" lIns="0" rIns="0" tIns="0" bIns="0">
+            <a:noAutofit/>
+          </a:bodyPr>
+          <a:lstStyle/>
+          <a:p>
+            <a:pPr algn="l">
+              <a:lnSpc>
+                <a:spcPct val="122000"/>
+              </a:lnSpc>
+            </a:pPr>
+            <a:r>
+              <a:rPr sz="2200" b="1" i="0">
+                <a:solidFill>
+                  <a:srgbClr val="1F4E78"/>
+                </a:solidFill>
+                <a:latin typeface="Calibri"/>
+                <a:ea typeface="Microsoft YaHei"/>
+                <a:cs typeface="Microsoft YaHei"/>
+              </a:rPr>
+              <a:t>依然没有 AI 可以替代。  </a:t>
+            </a:r>
+            <a:r>
+              <a:rPr sz="2200" b="0" i="0">
+                <a:solidFill>
+                  <a:srgbClr val="000000"/>
+                </a:solidFill>
+                <a:latin typeface="Calibri"/>
+                <a:ea typeface="Microsoft YaHei"/>
+                <a:cs typeface="Microsoft YaHei"/>
+              </a:rPr>
+              <a:t>本项目历史上没有任何自动化检查能够表述出教程 4.1 里的这两个 bug 中的任何一个——两个都是被人工发现的。</a:t>
+            </a:r>
+          </a:p>
+        </p:txBody>
+      </p:sp>
+      <p:sp>
+        <p:nvSpPr>
+          <p:cNvPr id="13" name="TextBox 12"/>
+          <p:cNvSpPr txBox="1"/>
+          <p:nvPr/>
+        </p:nvSpPr>
+        <p:spPr>
+          <a:xfrm>
+            <a:off x="685800" y="6355080"/>
+            <a:ext cx="9601200" cy="274320"/>
+          </a:xfrm>
+          <a:prstGeom prst="rect">
+            <a:avLst/>
+          </a:prstGeom>
+          <a:noFill/>
+        </p:spPr>
+        <p:txBody>
+          <a:bodyPr wrap="square" anchor="t" lIns="0" rIns="0" tIns="0" bIns="0">
+            <a:noAutofit/>
+          </a:bodyPr>
+          <a:lstStyle/>
+          <a:p>
+            <a:pPr algn="l"/>
+            <a:r>
+              <a:rPr sz="1200" b="0" i="1">
+                <a:solidFill>
+                  <a:srgbClr val="808080"/>
+                </a:solidFill>
+                <a:latin typeface="Calibri"/>
+                <a:ea typeface="Microsoft YaHei"/>
+                <a:cs typeface="Microsoft YaHei"/>
+              </a:rPr>
+              <a:t>docs/DESIGN_REVIEW_4_1_RELEASE.md ——人工手动验证</a:t>
+            </a:r>
+          </a:p>
+        </p:txBody>
+      </p:sp>
+      <p:sp>
+        <p:nvSpPr>
+          <p:cNvPr id="14" name="TextBox 13"/>
+          <p:cNvSpPr txBox="1"/>
+          <p:nvPr/>
+        </p:nvSpPr>
+        <p:spPr>
+          <a:xfrm>
+            <a:off x="10591495" y="6355080"/>
+            <a:ext cx="914400" cy="274320"/>
+          </a:xfrm>
+          <a:prstGeom prst="rect">
+            <a:avLst/>
+          </a:prstGeom>
+          <a:noFill/>
+        </p:spPr>
+        <p:txBody>
+          <a:bodyPr wrap="square" anchor="t" lIns="0" rIns="0" tIns="0" bIns="0">
+            <a:noAutofit/>
+          </a:bodyPr>
+          <a:lstStyle/>
+          <a:p>
+            <a:pPr algn="l"/>
+            <a:r>
+              <a:rPr sz="1200" b="0" i="0">
+                <a:solidFill>
+                  <a:srgbClr val="808080"/>
+                </a:solidFill>
+                <a:latin typeface="Calibri"/>
+                <a:ea typeface="Microsoft YaHei"/>
+                <a:cs typeface="Microsoft YaHei"/>
+              </a:rPr>
+              <a:t>23</a:t>
             </a:r>
           </a:p>
         </p:txBody>
